--- a/Introduccion a la Ingenieria/Clases/Clase 1 - Presentacion del curso y diagnostico inicial/Presentacion.pptx
+++ b/Introduccion a la Ingenieria/Clases/Clase 1 - Presentacion del curso y diagnostico inicial/Presentacion.pptx
@@ -3653,7 +3653,7 @@
               </a:spcAft>
             </a:pPr>
             <a:r>
-              <a:rPr sz="1600" b="0" i="0">
+              <a:rPr sz="2000" b="0" i="0">
                 <a:solidFill>
                   <a:srgbClr val="333333"/>
                 </a:solidFill>
@@ -3662,7 +3662,7 @@
               <a:t>–   </a:t>
             </a:r>
             <a:r>
-              <a:rPr sz="1600" b="1" i="0">
+              <a:rPr sz="2000" b="1" i="0">
                 <a:solidFill>
                   <a:srgbClr val="333333"/>
                 </a:solidFill>
@@ -3671,7 +3671,7 @@
               <a:t>Este curso no se aprueba con un examen final.</a:t>
             </a:r>
             <a:r>
-              <a:rPr sz="1600" b="0" i="0">
+              <a:rPr sz="2000" b="0" i="0">
                 <a:solidFill>
                   <a:srgbClr val="333333"/>
                 </a:solidFill>
@@ -3680,7 +3680,7 @@
               <a:t> Se aprueba con un </a:t>
             </a:r>
             <a:r>
-              <a:rPr sz="1600" b="1" i="0">
+              <a:rPr sz="2000" b="1" i="0">
                 <a:solidFill>
                   <a:srgbClr val="333333"/>
                 </a:solidFill>
@@ -3689,7 +3689,7 @@
               <a:t>proyecto de equipo</a:t>
             </a:r>
             <a:r>
-              <a:rPr sz="1600" b="0" i="0">
+              <a:rPr sz="2000" b="0" i="0">
                 <a:solidFill>
                   <a:srgbClr val="333333"/>
                 </a:solidFill>
@@ -3705,7 +3705,7 @@
               </a:spcAft>
             </a:pPr>
             <a:r>
-              <a:rPr sz="1600" b="0" i="0">
+              <a:rPr sz="2000" b="0" i="0">
                 <a:solidFill>
                   <a:srgbClr val="333333"/>
                 </a:solidFill>
@@ -3714,7 +3714,7 @@
               <a:t>–   </a:t>
             </a:r>
             <a:r>
-              <a:rPr sz="1600" b="1" i="0">
+              <a:rPr sz="2000" b="1" i="0">
                 <a:solidFill>
                   <a:srgbClr val="333333"/>
                 </a:solidFill>
@@ -3723,7 +3723,7 @@
               <a:t>Qué es:</a:t>
             </a:r>
             <a:r>
-              <a:rPr sz="1600" b="0" i="0">
+              <a:rPr sz="2000" b="0" i="0">
                 <a:solidFill>
                   <a:srgbClr val="333333"/>
                 </a:solidFill>
@@ -3732,7 +3732,7 @@
               <a:t> una propuesta de mejora tecnológica para un problema real del entorno de ustedes —el barrio, la universidad, el trabajo, la casa—. No hay que programarla: hay que </a:t>
             </a:r>
             <a:r>
-              <a:rPr sz="1600" b="1" i="0">
+              <a:rPr sz="2000" b="1" i="0">
                 <a:solidFill>
                   <a:srgbClr val="333333"/>
                 </a:solidFill>
@@ -3741,7 +3741,7 @@
               <a:t>diseñarla y defenderla</a:t>
             </a:r>
             <a:r>
-              <a:rPr sz="1600" b="0" i="0">
+              <a:rPr sz="2000" b="0" i="0">
                 <a:solidFill>
                   <a:srgbClr val="333333"/>
                 </a:solidFill>
@@ -3757,7 +3757,7 @@
               </a:spcAft>
             </a:pPr>
             <a:r>
-              <a:rPr sz="1600" b="0" i="0">
+              <a:rPr sz="2000" b="0" i="0">
                 <a:solidFill>
                   <a:srgbClr val="333333"/>
                 </a:solidFill>
@@ -3766,7 +3766,7 @@
               <a:t>–   </a:t>
             </a:r>
             <a:r>
-              <a:rPr sz="1600" b="1" i="0">
+              <a:rPr sz="2000" b="1" i="0">
                 <a:solidFill>
                   <a:srgbClr val="333333"/>
                 </a:solidFill>
@@ -3775,7 +3775,7 @@
               <a:t>Cómo se construye:</a:t>
             </a:r>
             <a:r>
-              <a:rPr sz="1600" b="0" i="0">
+              <a:rPr sz="2000" b="0" i="0">
                 <a:solidFill>
                   <a:srgbClr val="333333"/>
                 </a:solidFill>
@@ -3791,7 +3791,7 @@
               </a:spcAft>
             </a:pPr>
             <a:r>
-              <a:rPr sz="1600" b="0" i="0">
+              <a:rPr sz="2000" b="0" i="0">
                 <a:solidFill>
                   <a:srgbClr val="333333"/>
                 </a:solidFill>
@@ -3800,7 +3800,7 @@
               <a:t>–   </a:t>
             </a:r>
             <a:r>
-              <a:rPr sz="1600" b="1" i="0">
+              <a:rPr sz="2000" b="1" i="0">
                 <a:solidFill>
                   <a:srgbClr val="333333"/>
                 </a:solidFill>
@@ -3809,7 +3809,7 @@
               <a:t>La semilla es la actividad de hoy:</a:t>
             </a:r>
             <a:r>
-              <a:rPr sz="1600" b="0" i="0">
+              <a:rPr sz="2000" b="0" i="0">
                 <a:solidFill>
                   <a:srgbClr val="333333"/>
                 </a:solidFill>
@@ -3825,7 +3825,7 @@
               </a:spcAft>
             </a:pPr>
             <a:r>
-              <a:rPr sz="1600" b="0" i="0">
+              <a:rPr sz="2000" b="0" i="0">
                 <a:solidFill>
                   <a:srgbClr val="333333"/>
                 </a:solidFill>
@@ -3834,7 +3834,7 @@
               <a:t>–   </a:t>
             </a:r>
             <a:r>
-              <a:rPr sz="1600" b="1" i="0">
+              <a:rPr sz="2000" b="1" i="0">
                 <a:solidFill>
                   <a:srgbClr val="333333"/>
                 </a:solidFill>
@@ -3843,7 +3843,7 @@
               <a:t>Estrategia del curso:</a:t>
             </a:r>
             <a:r>
-              <a:rPr sz="1600" b="0" i="0">
+              <a:rPr sz="2000" b="0" i="0">
                 <a:solidFill>
                   <a:srgbClr val="333333"/>
                 </a:solidFill>
@@ -4063,7 +4063,7 @@
               </a:spcAft>
             </a:pPr>
             <a:r>
-              <a:rPr sz="1600" b="0" i="0">
+              <a:rPr sz="2000" b="0" i="0">
                 <a:solidFill>
                   <a:srgbClr val="333333"/>
                 </a:solidFill>
@@ -4072,7 +4072,7 @@
               <a:t>–   </a:t>
             </a:r>
             <a:r>
-              <a:rPr sz="1600" b="1" i="0">
+              <a:rPr sz="2000" b="1" i="0">
                 <a:solidFill>
                   <a:srgbClr val="333333"/>
                 </a:solidFill>
@@ -4081,7 +4081,7 @@
               <a:t>Cinco equipos, y son los mismos todo el semestre.</a:t>
             </a:r>
             <a:r>
-              <a:rPr sz="1600" b="0" i="0">
+              <a:rPr sz="2000" b="0" i="0">
                 <a:solidFill>
                   <a:srgbClr val="333333"/>
                 </a:solidFill>
@@ -4097,7 +4097,7 @@
               </a:spcAft>
             </a:pPr>
             <a:r>
-              <a:rPr sz="1600" b="0" i="0">
+              <a:rPr sz="2000" b="0" i="0">
                 <a:solidFill>
                   <a:srgbClr val="333333"/>
                 </a:solidFill>
@@ -4106,7 +4106,7 @@
               <a:t>–   </a:t>
             </a:r>
             <a:r>
-              <a:rPr sz="1600" b="1" i="0">
+              <a:rPr sz="2000" b="1" i="0">
                 <a:solidFill>
                   <a:srgbClr val="333333"/>
                 </a:solidFill>
@@ -4115,7 +4115,7 @@
               <a:t>Cuántos van en cada uno</a:t>
             </a:r>
             <a:r>
-              <a:rPr sz="1600" b="0" i="0">
+              <a:rPr sz="2000" b="0" i="0">
                 <a:solidFill>
                   <a:srgbClr val="333333"/>
                 </a:solidFill>
@@ -4124,7 +4124,7 @@
               <a:t> depende de cuántos seamos hoy: si somos 25, equipos de 5; si somos 35, equipos de 7. </a:t>
             </a:r>
             <a:r>
-              <a:rPr sz="1600" b="1" i="0">
+              <a:rPr sz="2000" b="1" i="0">
                 <a:solidFill>
                   <a:srgbClr val="333333"/>
                 </a:solidFill>
@@ -4140,7 +4140,7 @@
               </a:spcAft>
             </a:pPr>
             <a:r>
-              <a:rPr sz="1600" b="0" i="0">
+              <a:rPr sz="2000" b="0" i="0">
                 <a:solidFill>
                   <a:srgbClr val="333333"/>
                 </a:solidFill>
@@ -4149,7 +4149,7 @@
               <a:t>–   </a:t>
             </a:r>
             <a:r>
-              <a:rPr sz="1600" b="1" i="0">
+              <a:rPr sz="2000" b="1" i="0">
                 <a:solidFill>
                   <a:srgbClr val="333333"/>
                 </a:solidFill>
@@ -4158,7 +4158,7 @@
               <a:t>Por qué cinco:</a:t>
             </a:r>
             <a:r>
-              <a:rPr sz="1600" b="0" i="0">
+              <a:rPr sz="2000" b="0" i="0">
                 <a:solidFill>
                   <a:srgbClr val="333333"/>
                 </a:solidFill>
@@ -4167,7 +4167,7 @@
               <a:t> 5 equipos × 3 min = </a:t>
             </a:r>
             <a:r>
-              <a:rPr sz="1600" b="1" i="0">
+              <a:rPr sz="2000" b="1" i="0">
                 <a:solidFill>
                   <a:srgbClr val="333333"/>
                 </a:solidFill>
@@ -4176,7 +4176,7 @@
               <a:t>15 min de exposiciones</a:t>
             </a:r>
             <a:r>
-              <a:rPr sz="1600" b="0" i="0">
+              <a:rPr sz="2000" b="0" i="0">
                 <a:solidFill>
                   <a:srgbClr val="333333"/>
                 </a:solidFill>
@@ -4192,7 +4192,7 @@
               </a:spcAft>
             </a:pPr>
             <a:r>
-              <a:rPr sz="1600" b="0" i="0">
+              <a:rPr sz="2000" b="0" i="0">
                 <a:solidFill>
                   <a:srgbClr val="333333"/>
                 </a:solidFill>
@@ -4201,7 +4201,7 @@
               <a:t>–   </a:t>
             </a:r>
             <a:r>
-              <a:rPr sz="1600" b="1" i="0">
+              <a:rPr sz="2000" b="1" i="0">
                 <a:solidFill>
                   <a:srgbClr val="333333"/>
                 </a:solidFill>
@@ -4210,7 +4210,7 @@
               <a:t>El vocero rota cada sesión</a:t>
             </a:r>
             <a:r>
-              <a:rPr sz="1600" b="0" i="0">
+              <a:rPr sz="2000" b="0" i="0">
                 <a:solidFill>
                   <a:srgbClr val="333333"/>
                 </a:solidFill>
@@ -4226,7 +4226,7 @@
               </a:spcAft>
             </a:pPr>
             <a:r>
-              <a:rPr sz="1600" b="0" i="0">
+              <a:rPr sz="2000" b="0" i="0">
                 <a:solidFill>
                   <a:srgbClr val="333333"/>
                 </a:solidFill>
@@ -4235,7 +4235,7 @@
               <a:t>–   </a:t>
             </a:r>
             <a:r>
-              <a:rPr sz="1600" b="1" i="0">
+              <a:rPr sz="2000" b="1" i="0">
                 <a:solidFill>
                   <a:srgbClr val="333333"/>
                 </a:solidFill>
@@ -4244,7 +4244,7 @@
               <a:t>Hoy quedan tres cosas listas:</a:t>
             </a:r>
             <a:r>
-              <a:rPr sz="1600" b="0" i="0">
+              <a:rPr sz="2000" b="0" i="0">
                 <a:solidFill>
                   <a:srgbClr val="333333"/>
                 </a:solidFill>
@@ -4253,7 +4253,7 @@
               <a:t> los integrantes, la </a:t>
             </a:r>
             <a:r>
-              <a:rPr sz="1600" b="1" i="0">
+              <a:rPr sz="2000" b="1" i="0">
                 <a:solidFill>
                   <a:srgbClr val="333333"/>
                 </a:solidFill>
@@ -4262,7 +4262,7 @@
               <a:t>carpeta compartida en la nube</a:t>
             </a:r>
             <a:r>
-              <a:rPr sz="1600" b="0" i="0">
+              <a:rPr sz="2000" b="0" i="0">
                 <a:solidFill>
                   <a:srgbClr val="333333"/>
                 </a:solidFill>
@@ -4271,7 +4271,7 @@
               <a:t> con permiso de lectura para el docente, y el </a:t>
             </a:r>
             <a:r>
-              <a:rPr sz="1600" b="1" i="0">
+              <a:rPr sz="2000" b="1" i="0">
                 <a:solidFill>
                   <a:srgbClr val="333333"/>
                 </a:solidFill>
@@ -4280,7 +4280,7 @@
               <a:t>vocero de hoy</a:t>
             </a:r>
             <a:r>
-              <a:rPr sz="1600" b="0" i="0">
+              <a:rPr sz="2000" b="0" i="0">
                 <a:solidFill>
                   <a:srgbClr val="333333"/>
                 </a:solidFill>
@@ -6520,7 +6520,7 @@
               </a:spcAft>
             </a:pPr>
             <a:r>
-              <a:rPr sz="1600" b="0" i="0">
+              <a:rPr sz="2000" b="0" i="0">
                 <a:solidFill>
                   <a:srgbClr val="333333"/>
                 </a:solidFill>
@@ -6529,7 +6529,7 @@
               <a:t>–   </a:t>
             </a:r>
             <a:r>
-              <a:rPr sz="1600" b="1" i="0">
+              <a:rPr sz="2000" b="1" i="0">
                 <a:solidFill>
                   <a:srgbClr val="333333"/>
                 </a:solidFill>
@@ -6538,7 +6538,7 @@
               <a:t>Trabajo dirigido:</a:t>
             </a:r>
             <a:r>
-              <a:rPr sz="1600" b="0" i="0">
+              <a:rPr sz="2000" b="0" i="0">
                 <a:solidFill>
                   <a:srgbClr val="333333"/>
                 </a:solidFill>
@@ -6554,7 +6554,7 @@
               </a:spcAft>
             </a:pPr>
             <a:r>
-              <a:rPr sz="1600" b="0" i="0">
+              <a:rPr sz="2000" b="0" i="0">
                 <a:solidFill>
                   <a:srgbClr val="333333"/>
                 </a:solidFill>
@@ -6563,7 +6563,7 @@
               <a:t>–   </a:t>
             </a:r>
             <a:r>
-              <a:rPr sz="1600" b="1" i="0">
+              <a:rPr sz="2000" b="1" i="0">
                 <a:solidFill>
                   <a:srgbClr val="333333"/>
                 </a:solidFill>
@@ -6572,7 +6572,7 @@
               <a:t>Trabajo independiente:</a:t>
             </a:r>
             <a:r>
-              <a:rPr sz="1600" b="0" i="0">
+              <a:rPr sz="2000" b="0" i="0">
                 <a:solidFill>
                   <a:srgbClr val="333333"/>
                 </a:solidFill>
@@ -6588,7 +6588,7 @@
               </a:spcAft>
             </a:pPr>
             <a:r>
-              <a:rPr sz="1600" b="0" i="0">
+              <a:rPr sz="2000" b="0" i="0">
                 <a:solidFill>
                   <a:srgbClr val="333333"/>
                 </a:solidFill>
@@ -6597,7 +6597,7 @@
               <a:t>–   </a:t>
             </a:r>
             <a:r>
-              <a:rPr sz="1600" b="1" i="0">
+              <a:rPr sz="2000" b="1" i="0">
                 <a:solidFill>
                   <a:srgbClr val="333333"/>
                 </a:solidFill>
@@ -6613,7 +6613,7 @@
               </a:spcAft>
             </a:pPr>
             <a:r>
-              <a:rPr sz="1600" b="0" i="0">
+              <a:rPr sz="2000" b="0" i="0">
                 <a:solidFill>
                   <a:srgbClr val="333333"/>
                 </a:solidFill>
@@ -6622,7 +6622,7 @@
               <a:t>–   </a:t>
             </a:r>
             <a:r>
-              <a:rPr sz="1600" b="1" i="0">
+              <a:rPr sz="2000" b="1" i="0">
                 <a:solidFill>
                   <a:srgbClr val="333333"/>
                 </a:solidFill>
@@ -6631,7 +6631,7 @@
               <a:t>Aviso:</a:t>
             </a:r>
             <a:r>
-              <a:rPr sz="1600" b="0" i="0">
+              <a:rPr sz="2000" b="0" i="0">
                 <a:solidFill>
                   <a:srgbClr val="333333"/>
                 </a:solidFill>
@@ -6647,7 +6647,7 @@
               </a:spcAft>
             </a:pPr>
             <a:r>
-              <a:rPr sz="1600" b="0" i="0">
+              <a:rPr sz="2000" b="0" i="0">
                 <a:solidFill>
                   <a:srgbClr val="333333"/>
                 </a:solidFill>
@@ -7221,7 +7221,7 @@
         <p:spPr>
           <a:xfrm>
             <a:off x="502920" y="2798064"/>
-            <a:ext cx="1788109" cy="2560320"/>
+            <a:ext cx="1788109" cy="3099816"/>
           </a:xfrm>
           <a:prstGeom prst="rect">
             <a:avLst/>
@@ -7345,7 +7345,7 @@
         <p:spPr>
           <a:xfrm>
             <a:off x="2382469" y="2798064"/>
-            <a:ext cx="1788109" cy="2560320"/>
+            <a:ext cx="1788109" cy="3099816"/>
           </a:xfrm>
           <a:prstGeom prst="rect">
             <a:avLst/>
@@ -7469,7 +7469,7 @@
         <p:spPr>
           <a:xfrm>
             <a:off x="4262018" y="2798064"/>
-            <a:ext cx="1788109" cy="2560320"/>
+            <a:ext cx="1788109" cy="3099816"/>
           </a:xfrm>
           <a:prstGeom prst="rect">
             <a:avLst/>
@@ -7593,7 +7593,7 @@
         <p:spPr>
           <a:xfrm>
             <a:off x="6141567" y="2798064"/>
-            <a:ext cx="1788109" cy="2560320"/>
+            <a:ext cx="1788109" cy="3099816"/>
           </a:xfrm>
           <a:prstGeom prst="rect">
             <a:avLst/>
@@ -7717,7 +7717,7 @@
         <p:spPr>
           <a:xfrm>
             <a:off x="8021116" y="2798064"/>
-            <a:ext cx="1788109" cy="2560320"/>
+            <a:ext cx="1788109" cy="3099816"/>
           </a:xfrm>
           <a:prstGeom prst="rect">
             <a:avLst/>
@@ -7841,7 +7841,7 @@
         <p:spPr>
           <a:xfrm>
             <a:off x="9900666" y="2798064"/>
-            <a:ext cx="1788109" cy="2560320"/>
+            <a:ext cx="1788109" cy="3099816"/>
           </a:xfrm>
           <a:prstGeom prst="rect">
             <a:avLst/>
@@ -7884,8 +7884,8 @@
         </p:nvSpPr>
         <p:spPr>
           <a:xfrm>
-            <a:off x="457200" y="5943600"/>
-            <a:ext cx="11277295" cy="365760"/>
+            <a:off x="457200" y="5806440"/>
+            <a:ext cx="11277295" cy="640080"/>
           </a:xfrm>
           <a:prstGeom prst="rect">
             <a:avLst/>
@@ -8138,7 +8138,7 @@
               </a:spcAft>
             </a:pPr>
             <a:r>
-              <a:rPr sz="1600" b="0" i="0">
+              <a:rPr sz="2000" b="0" i="0">
                 <a:solidFill>
                   <a:srgbClr val="333333"/>
                 </a:solidFill>
@@ -8147,7 +8147,7 @@
               <a:t>–   Distinguir la </a:t>
             </a:r>
             <a:r>
-              <a:rPr sz="1600" b="1" i="0">
+              <a:rPr sz="2000" b="1" i="0">
                 <a:solidFill>
                   <a:srgbClr val="333333"/>
                 </a:solidFill>
@@ -8156,7 +8156,7 @@
               <a:t>Ingeniería de Sistemas</a:t>
             </a:r>
             <a:r>
-              <a:rPr sz="1600" b="0" i="0">
+              <a:rPr sz="2000" b="0" i="0">
                 <a:solidFill>
                   <a:srgbClr val="333333"/>
                 </a:solidFill>
@@ -8165,7 +8165,7 @@
               <a:t> de la programación, y la </a:t>
             </a:r>
             <a:r>
-              <a:rPr sz="1600" b="1" i="0">
+              <a:rPr sz="2000" b="1" i="0">
                 <a:solidFill>
                   <a:srgbClr val="333333"/>
                 </a:solidFill>
@@ -8174,7 +8174,7 @@
               <a:t>decisión de ingeniería</a:t>
             </a:r>
             <a:r>
-              <a:rPr sz="1600" b="0" i="0">
+              <a:rPr sz="2000" b="0" i="0">
                 <a:solidFill>
                   <a:srgbClr val="333333"/>
                 </a:solidFill>
@@ -8190,7 +8190,7 @@
               </a:spcAft>
             </a:pPr>
             <a:r>
-              <a:rPr sz="1600" b="0" i="0">
+              <a:rPr sz="2000" b="0" i="0">
                 <a:solidFill>
                   <a:srgbClr val="333333"/>
                 </a:solidFill>
@@ -8199,7 +8199,7 @@
               <a:t>–   Nombrar los </a:t>
             </a:r>
             <a:r>
-              <a:rPr sz="1600" b="1" i="0">
+              <a:rPr sz="2000" b="1" i="0">
                 <a:solidFill>
                   <a:srgbClr val="333333"/>
                 </a:solidFill>
@@ -8208,7 +8208,7 @@
               <a:t>cinco campos de acción</a:t>
             </a:r>
             <a:r>
-              <a:rPr sz="1600" b="0" i="0">
+              <a:rPr sz="2000" b="0" i="0">
                 <a:solidFill>
                   <a:srgbClr val="333333"/>
                 </a:solidFill>
@@ -8224,7 +8224,7 @@
               </a:spcAft>
             </a:pPr>
             <a:r>
-              <a:rPr sz="1600" b="0" i="0">
+              <a:rPr sz="2000" b="0" i="0">
                 <a:solidFill>
                   <a:srgbClr val="333333"/>
                 </a:solidFill>
@@ -8233,7 +8233,7 @@
               <a:t>–   Detectar </a:t>
             </a:r>
             <a:r>
-              <a:rPr sz="1600" b="1" i="0">
+              <a:rPr sz="2000" b="1" i="0">
                 <a:solidFill>
                   <a:srgbClr val="333333"/>
                 </a:solidFill>
@@ -8242,7 +8242,7 @@
               <a:t>un problema del entorno</a:t>
             </a:r>
             <a:r>
-              <a:rPr sz="1600" b="0" i="0">
+              <a:rPr sz="2000" b="0" i="0">
                 <a:solidFill>
                   <a:srgbClr val="333333"/>
                 </a:solidFill>
@@ -8258,7 +8258,7 @@
               </a:spcAft>
             </a:pPr>
             <a:r>
-              <a:rPr sz="1600" b="0" i="0">
+              <a:rPr sz="2000" b="0" i="0">
                 <a:solidFill>
                   <a:srgbClr val="333333"/>
                 </a:solidFill>
@@ -8267,7 +8267,7 @@
               <a:t>–   Quedar en un </a:t>
             </a:r>
             <a:r>
-              <a:rPr sz="1600" b="1" i="0">
+              <a:rPr sz="2000" b="1" i="0">
                 <a:solidFill>
                   <a:srgbClr val="333333"/>
                 </a:solidFill>
@@ -8276,7 +8276,7 @@
               <a:t>equipo estable</a:t>
             </a:r>
             <a:r>
-              <a:rPr sz="1600" b="0" i="0">
+              <a:rPr sz="2000" b="0" i="0">
                 <a:solidFill>
                   <a:srgbClr val="333333"/>
                 </a:solidFill>
@@ -10147,7 +10147,7 @@
               </a:spcAft>
             </a:pPr>
             <a:r>
-              <a:rPr sz="1600" b="0" i="0">
+              <a:rPr sz="2000" b="0" i="0">
                 <a:solidFill>
                   <a:srgbClr val="333333"/>
                 </a:solidFill>
@@ -10156,7 +10156,7 @@
               <a:t>–   </a:t>
             </a:r>
             <a:r>
-              <a:rPr sz="1600" b="1" i="0">
+              <a:rPr sz="2000" b="1" i="0">
                 <a:solidFill>
                   <a:srgbClr val="333333"/>
                 </a:solidFill>
@@ -10165,7 +10165,7 @@
               <a:t>Definición de trabajo para el semestre:</a:t>
             </a:r>
             <a:r>
-              <a:rPr sz="1600" b="0" i="0">
+              <a:rPr sz="2000" b="0" i="0">
                 <a:solidFill>
                   <a:srgbClr val="333333"/>
                 </a:solidFill>
@@ -10174,7 +10174,7 @@
               <a:t> la ingeniería es el oficio de </a:t>
             </a:r>
             <a:r>
-              <a:rPr sz="1600" b="1" i="0">
+              <a:rPr sz="2000" b="1" i="0">
                 <a:solidFill>
                   <a:srgbClr val="333333"/>
                 </a:solidFill>
@@ -10183,7 +10183,7 @@
               <a:t>decidir</a:t>
             </a:r>
             <a:r>
-              <a:rPr sz="1600" b="0" i="0">
+              <a:rPr sz="2000" b="0" i="0">
                 <a:solidFill>
                   <a:srgbClr val="333333"/>
                 </a:solidFill>
@@ -10192,7 +10192,7 @@
               <a:t> cómo resolver un problema real </a:t>
             </a:r>
             <a:r>
-              <a:rPr sz="1600" b="1" i="0">
+              <a:rPr sz="2000" b="1" i="0">
                 <a:solidFill>
                   <a:srgbClr val="333333"/>
                 </a:solidFill>
@@ -10201,7 +10201,7 @@
               <a:t>con recursos limitados</a:t>
             </a:r>
             <a:r>
-              <a:rPr sz="1600" b="0" i="0">
+              <a:rPr sz="2000" b="0" i="0">
                 <a:solidFill>
                   <a:srgbClr val="333333"/>
                 </a:solidFill>
@@ -10217,7 +10217,7 @@
               </a:spcAft>
             </a:pPr>
             <a:r>
-              <a:rPr sz="1600" b="0" i="0">
+              <a:rPr sz="2000" b="0" i="0">
                 <a:solidFill>
                   <a:srgbClr val="333333"/>
                 </a:solidFill>
@@ -10226,7 +10226,7 @@
               <a:t>–   Las tres palabras que hacen el trabajo: </a:t>
             </a:r>
             <a:r>
-              <a:rPr sz="1600" b="1" i="0">
+              <a:rPr sz="2000" b="1" i="0">
                 <a:solidFill>
                   <a:srgbClr val="333333"/>
                 </a:solidFill>
@@ -10235,7 +10235,7 @@
               <a:t>problema</a:t>
             </a:r>
             <a:r>
-              <a:rPr sz="1600" b="0" i="0">
+              <a:rPr sz="2000" b="0" i="0">
                 <a:solidFill>
                   <a:srgbClr val="333333"/>
                 </a:solidFill>
@@ -10244,7 +10244,7 @@
               <a:t> (algo le duele a alguien concreto), </a:t>
             </a:r>
             <a:r>
-              <a:rPr sz="1600" b="1" i="0">
+              <a:rPr sz="2000" b="1" i="0">
                 <a:solidFill>
                   <a:srgbClr val="333333"/>
                 </a:solidFill>
@@ -10253,7 +10253,7 @@
               <a:t>restricción</a:t>
             </a:r>
             <a:r>
-              <a:rPr sz="1600" b="0" i="0">
+              <a:rPr sz="2000" b="0" i="0">
                 <a:solidFill>
                   <a:srgbClr val="333333"/>
                 </a:solidFill>
@@ -10262,7 +10262,7 @@
               <a:t> (tiempo, dinero, energía, personas, ley) y </a:t>
             </a:r>
             <a:r>
-              <a:rPr sz="1600" b="1" i="0">
+              <a:rPr sz="2000" b="1" i="0">
                 <a:solidFill>
                   <a:srgbClr val="333333"/>
                 </a:solidFill>
@@ -10271,7 +10271,7 @@
               <a:t>consecuencia</a:t>
             </a:r>
             <a:r>
-              <a:rPr sz="1600" b="0" i="0">
+              <a:rPr sz="2000" b="0" i="0">
                 <a:solidFill>
                   <a:srgbClr val="333333"/>
                 </a:solidFill>
@@ -10287,7 +10287,7 @@
               </a:spcAft>
             </a:pPr>
             <a:r>
-              <a:rPr sz="1600" b="0" i="0">
+              <a:rPr sz="2000" b="0" i="0">
                 <a:solidFill>
                   <a:srgbClr val="333333"/>
                 </a:solidFill>
@@ -10296,7 +10296,7 @@
               <a:t>–   Si no hay restricción, no hay ingeniería: hay un deseo. </a:t>
             </a:r>
             <a:r>
-              <a:rPr sz="1600" b="1" i="0">
+              <a:rPr sz="2000" b="1" i="0">
                 <a:solidFill>
                   <a:srgbClr val="333333"/>
                 </a:solidFill>
@@ -10312,7 +10312,7 @@
               </a:spcAft>
             </a:pPr>
             <a:r>
-              <a:rPr sz="1600" b="0" i="0">
+              <a:rPr sz="2000" b="0" i="0">
                 <a:solidFill>
                   <a:srgbClr val="333333"/>
                 </a:solidFill>
@@ -10321,7 +10321,7 @@
               <a:t>–   </a:t>
             </a:r>
             <a:r>
-              <a:rPr sz="1600" b="1" i="0">
+              <a:rPr sz="2000" b="1" i="0">
                 <a:solidFill>
                   <a:srgbClr val="333333"/>
                 </a:solidFill>
@@ -10330,7 +10330,7 @@
               <a:t>La Ingeniería de Sistemas</a:t>
             </a:r>
             <a:r>
-              <a:rPr sz="1600" b="0" i="0">
+              <a:rPr sz="2000" b="0" i="0">
                 <a:solidFill>
                   <a:srgbClr val="333333"/>
                 </a:solidFill>
@@ -10346,7 +10346,7 @@
               </a:spcAft>
             </a:pPr>
             <a:r>
-              <a:rPr sz="1600" b="0" i="0">
+              <a:rPr sz="2000" b="0" i="0">
                 <a:solidFill>
                   <a:srgbClr val="333333"/>
                 </a:solidFill>
@@ -10355,7 +10355,7 @@
               <a:t>–   El término «ingeniería de sistemas» nace en los años cuarenta, en proyectos de telecomunicaciones demasiado grandes para una sola especialidad. </a:t>
             </a:r>
             <a:r>
-              <a:rPr sz="1600" b="1" i="0">
+              <a:rPr sz="2000" b="1" i="0">
                 <a:solidFill>
                   <a:srgbClr val="333333"/>
                 </a:solidFill>
@@ -10364,7 +10364,7 @@
               <a:t>La historia es el tema de la sesión 2</a:t>
             </a:r>
             <a:r>
-              <a:rPr sz="1600" b="0" i="0">
+              <a:rPr sz="2000" b="0" i="0">
                 <a:solidFill>
                   <a:srgbClr val="333333"/>
                 </a:solidFill>

--- a/Introduccion a la Ingenieria/Clases/Clase 1 - Presentacion del curso y diagnostico inicial/Presentacion.pptx
+++ b/Introduccion a la Ingenieria/Clases/Clase 1 - Presentacion del curso y diagnostico inicial/Presentacion.pptx
@@ -3695,7 +3695,7 @@
                 </a:solidFill>
                 <a:latin typeface="Calibri"/>
               </a:rPr>
-              <a:t> que arranca hoy y se expone en la sesión 15.</a:t>
+              <a:t> que arranca hoy y se expone en la Clase 15.</a:t>
             </a:r>
           </a:p>
           <a:p>
@@ -3781,7 +3781,7 @@
                 </a:solidFill>
                 <a:latin typeface="Calibri"/>
               </a:rPr>
-              <a:t> sesión 6, el problema y la propuesta inicial (cierra Corte 1) · sesiones 7 a 11, el ciclo de vida y un prototipo (cierra Corte 2) · sesiones 12 a 14, evaluación de impacto y ensayo · sesión 15, exposición final · sesión 16, informe.</a:t>
+              <a:t> Clase 6, el problema y la propuesta inicial (cierra Corte 1) · Clases 7 a 11, el ciclo de vida y un prototipo (cierra Corte 2) · Clases 12 a 14, evaluación de impacto y ensayo · Clase 15, exposición final · Clase 16, informe.</a:t>
             </a:r>
           </a:p>
           <a:p>
@@ -11625,7 +11625,7 @@
                 </a:solidFill>
                 <a:latin typeface="Calibri"/>
               </a:rPr>
-              <a:t>Los mismos cuatro pasos, de la actividad de hoy al proyecto de la sesión 15</a:t>
+              <a:t>Los mismos cuatro pasos, de la actividad de hoy al proyecto de la Clase 15</a:t>
             </a:r>
           </a:p>
         </p:txBody>
